--- a/Telegram-Web-App-bot-Pesni-na-Zakaz-v-Voennoj-Tematike.pptx
+++ b/Telegram-Web-App-bot-Pesni-na-Zakaz-v-Voennoj-Tematike.pptx
@@ -28,6 +28,8 @@
       <p:font typeface="Source Sans Pro" panose="020B0503030403020204" pitchFamily="34" charset="0"/>
       <p:regular r:id="rId12"/>
       <p:bold r:id="rId13"/>
+      <p:italic r:id="rId14"/>
+      <p:boldItalic r:id="rId15"/>
     </p:embeddedFont>
   </p:embeddedFontLst>
   <p:defaultTextStyle>
@@ -2271,6 +2273,23 @@
               </a:solidFill>
               <a:ea typeface="Source Sans Pro Bold" pitchFamily="34" charset="-122"/>
             </a:endParaRPr>
+          </a:p>
+          <a:p>
+            <a:pPr marL="0" indent="0" algn="l">
+              <a:lnSpc>
+                <a:spcPts val="3100"/>
+              </a:lnSpc>
+              <a:buNone/>
+            </a:pPr>
+            <a:r>
+              <a:rPr lang="ru-RU" sz="2200" b="1" dirty="0">
+                <a:solidFill>
+                  <a:srgbClr val="2B4150"/>
+                </a:solidFill>
+                <a:ea typeface="Source Sans Pro Bold" pitchFamily="34" charset="-122"/>
+              </a:rPr>
+              <a:t>Френкель Марк</a:t>
+            </a:r>
           </a:p>
         </p:txBody>
       </p:sp>
